--- a/その他/高校対応/自己紹介.pptx
+++ b/その他/高校対応/自己紹介.pptx
@@ -342,7 +342,7 @@
           <a:p>
             <a:fld id="{B666B9C9-A3AA-462B-AA08-59196B1B6C77}" type="datetimeFigureOut">
               <a:rPr kumimoji="1" lang="ja-JP" altLang="en-US" smtClean="0"/>
-              <a:t>2026/7/6</a:t>
+              <a:t>2026/9/24</a:t>
             </a:fld>
             <a:endParaRPr kumimoji="1" lang="ja-JP" altLang="en-US"/>
           </a:p>
@@ -582,7 +582,7 @@
           <a:p>
             <a:fld id="{B666B9C9-A3AA-462B-AA08-59196B1B6C77}" type="datetimeFigureOut">
               <a:rPr kumimoji="1" lang="ja-JP" altLang="en-US" smtClean="0"/>
-              <a:t>2026/7/6</a:t>
+              <a:t>2026/9/24</a:t>
             </a:fld>
             <a:endParaRPr kumimoji="1" lang="ja-JP" altLang="en-US"/>
           </a:p>
@@ -870,7 +870,7 @@
           <a:p>
             <a:fld id="{B666B9C9-A3AA-462B-AA08-59196B1B6C77}" type="datetimeFigureOut">
               <a:rPr kumimoji="1" lang="ja-JP" altLang="en-US" smtClean="0"/>
-              <a:t>2026/7/6</a:t>
+              <a:t>2026/9/24</a:t>
             </a:fld>
             <a:endParaRPr kumimoji="1" lang="ja-JP" altLang="en-US"/>
           </a:p>
@@ -1072,7 +1072,7 @@
           <a:p>
             <a:fld id="{B666B9C9-A3AA-462B-AA08-59196B1B6C77}" type="datetimeFigureOut">
               <a:rPr kumimoji="1" lang="ja-JP" altLang="en-US" smtClean="0"/>
-              <a:t>2026/7/6</a:t>
+              <a:t>2026/9/24</a:t>
             </a:fld>
             <a:endParaRPr kumimoji="1" lang="ja-JP" altLang="en-US"/>
           </a:p>
@@ -1415,7 +1415,7 @@
           <a:p>
             <a:fld id="{B666B9C9-A3AA-462B-AA08-59196B1B6C77}" type="datetimeFigureOut">
               <a:rPr kumimoji="1" lang="ja-JP" altLang="en-US" smtClean="0"/>
-              <a:t>2026/7/6</a:t>
+              <a:t>2026/9/24</a:t>
             </a:fld>
             <a:endParaRPr kumimoji="1" lang="ja-JP" altLang="en-US"/>
           </a:p>
@@ -1754,7 +1754,7 @@
           <a:p>
             <a:fld id="{B666B9C9-A3AA-462B-AA08-59196B1B6C77}" type="datetimeFigureOut">
               <a:rPr kumimoji="1" lang="ja-JP" altLang="en-US" smtClean="0"/>
-              <a:t>2026/7/6</a:t>
+              <a:t>2026/9/24</a:t>
             </a:fld>
             <a:endParaRPr kumimoji="1" lang="ja-JP" altLang="en-US"/>
           </a:p>
@@ -2197,7 +2197,7 @@
           <a:p>
             <a:fld id="{B666B9C9-A3AA-462B-AA08-59196B1B6C77}" type="datetimeFigureOut">
               <a:rPr kumimoji="1" lang="ja-JP" altLang="en-US" smtClean="0"/>
-              <a:t>2026/7/6</a:t>
+              <a:t>2026/9/24</a:t>
             </a:fld>
             <a:endParaRPr kumimoji="1" lang="ja-JP" altLang="en-US"/>
           </a:p>
@@ -2315,7 +2315,7 @@
           <a:p>
             <a:fld id="{B666B9C9-A3AA-462B-AA08-59196B1B6C77}" type="datetimeFigureOut">
               <a:rPr kumimoji="1" lang="ja-JP" altLang="en-US" smtClean="0"/>
-              <a:t>2026/7/6</a:t>
+              <a:t>2026/9/24</a:t>
             </a:fld>
             <a:endParaRPr kumimoji="1" lang="ja-JP" altLang="en-US"/>
           </a:p>
@@ -2486,7 +2486,7 @@
           <a:p>
             <a:fld id="{B666B9C9-A3AA-462B-AA08-59196B1B6C77}" type="datetimeFigureOut">
               <a:rPr kumimoji="1" lang="ja-JP" altLang="en-US" smtClean="0"/>
-              <a:t>2026/7/6</a:t>
+              <a:t>2026/9/24</a:t>
             </a:fld>
             <a:endParaRPr kumimoji="1" lang="ja-JP" altLang="en-US"/>
           </a:p>
@@ -2872,7 +2872,7 @@
           <a:p>
             <a:fld id="{B666B9C9-A3AA-462B-AA08-59196B1B6C77}" type="datetimeFigureOut">
               <a:rPr kumimoji="1" lang="ja-JP" altLang="en-US" smtClean="0"/>
-              <a:t>2026/7/6</a:t>
+              <a:t>2026/9/24</a:t>
             </a:fld>
             <a:endParaRPr kumimoji="1" lang="ja-JP" altLang="en-US"/>
           </a:p>
@@ -3249,7 +3249,7 @@
           <a:p>
             <a:fld id="{B666B9C9-A3AA-462B-AA08-59196B1B6C77}" type="datetimeFigureOut">
               <a:rPr kumimoji="1" lang="ja-JP" altLang="en-US" smtClean="0"/>
-              <a:t>2026/7/6</a:t>
+              <a:t>2026/9/24</a:t>
             </a:fld>
             <a:endParaRPr kumimoji="1" lang="ja-JP" altLang="en-US"/>
           </a:p>
@@ -3568,7 +3568,7 @@
           <a:p>
             <a:fld id="{B666B9C9-A3AA-462B-AA08-59196B1B6C77}" type="datetimeFigureOut">
               <a:rPr kumimoji="1" lang="ja-JP" altLang="en-US" smtClean="0"/>
-              <a:t>2026/7/6</a:t>
+              <a:t>2026/9/24</a:t>
             </a:fld>
             <a:endParaRPr kumimoji="1" lang="ja-JP" altLang="en-US"/>
           </a:p>
@@ -4291,17 +4291,25 @@
             </a:r>
             <a:r>
               <a:rPr lang="ja-JP" altLang="en-US" dirty="0"/>
-              <a:t>年勤めた後、再度専門学校の教員に転職。（北九州情報</a:t>
+              <a:t>年勤めた後、再度専門学校の教員に転職。</a:t>
             </a:r>
             <a:r>
               <a:rPr lang="en-US" altLang="ja-JP" dirty="0"/>
-              <a:t>IT</a:t>
-            </a:r>
-            <a:r>
-              <a:rPr lang="ja-JP" altLang="en-US" dirty="0"/>
-              <a:t>クリエイター専門学校）</a:t>
-            </a:r>
-            <a:endParaRPr lang="en-US" altLang="ja-JP" dirty="0"/>
+              <a:t>	</a:t>
+            </a:r>
+            <a:r>
+              <a:rPr lang="ja-JP" altLang="en-US" dirty="0">
+                <a:solidFill>
+                  <a:srgbClr val="FF0000"/>
+                </a:solidFill>
+              </a:rPr>
+              <a:t>←いまここ</a:t>
+            </a:r>
+            <a:endParaRPr lang="en-US" altLang="ja-JP" dirty="0">
+              <a:solidFill>
+                <a:srgbClr val="FF0000"/>
+              </a:solidFill>
+            </a:endParaRPr>
           </a:p>
           <a:p>
             <a:pPr marL="0" indent="0">
